--- a/03-Slides/ETHAGT04/ETHAGT04-Apresentacao.pptx
+++ b/03-Slides/ETHAGT04/ETHAGT04-Apresentacao.pptx
@@ -10379,6 +10379,42 @@
         </p:nvSpPr>
         <p:spPr>
           <a:xfrm>
+            <a:off x="274320" y="6035040"/>
+            <a:ext cx="11612880" cy="320040"/>
+          </a:xfrm>
+          <a:prstGeom prst="rect">
+            <a:avLst/>
+          </a:prstGeom>
+          <a:noFill/>
+        </p:spPr>
+        <p:txBody>
+          <a:bodyPr wrap="square">
+            <a:spAutoFit/>
+          </a:bodyPr>
+          <a:lstStyle/>
+          <a:p>
+            <a:pPr algn="l">
+              <a:defRPr sz="900" b="0">
+                <a:solidFill>
+                  <a:srgbClr val="2980B9"/>
+                </a:solidFill>
+                <a:latin typeface="Segoe UI"/>
+              </a:defRPr>
+            </a:pPr>
+            <a:r>
+              <a:t>HITL = Human-in-the-Loop — Humano no Ciclo</a:t>
+            </a:r>
+          </a:p>
+        </p:txBody>
+      </p:sp>
+      <p:sp>
+        <p:nvSpPr>
+          <p:cNvPr id="8" name="TextBox 7"/>
+          <p:cNvSpPr txBox="1"/>
+          <p:nvPr/>
+        </p:nvSpPr>
+        <p:spPr>
+          <a:xfrm>
             <a:off x="274320" y="6400800"/>
             <a:ext cx="6400800" cy="365760"/>
           </a:xfrm>
@@ -10409,7 +10445,7 @@
       </p:sp>
       <p:sp>
         <p:nvSpPr>
-          <p:cNvPr id="8" name="TextBox 7"/>
+          <p:cNvPr id="9" name="TextBox 8"/>
           <p:cNvSpPr txBox="1"/>
           <p:nvPr/>
         </p:nvSpPr>
@@ -11191,6 +11227,42 @@
         </p:nvSpPr>
         <p:spPr>
           <a:xfrm>
+            <a:off x="274320" y="6035040"/>
+            <a:ext cx="11612880" cy="320040"/>
+          </a:xfrm>
+          <a:prstGeom prst="rect">
+            <a:avLst/>
+          </a:prstGeom>
+          <a:noFill/>
+        </p:spPr>
+        <p:txBody>
+          <a:bodyPr wrap="square">
+            <a:spAutoFit/>
+          </a:bodyPr>
+          <a:lstStyle/>
+          <a:p>
+            <a:pPr algn="l">
+              <a:defRPr sz="900" b="0">
+                <a:solidFill>
+                  <a:srgbClr val="2980B9"/>
+                </a:solidFill>
+                <a:latin typeface="Segoe UI"/>
+              </a:defRPr>
+            </a:pPr>
+            <a:r>
+              <a:t>LATS = Language Agent Tree Search — Busca em Arvore com LLM  ·  ReAct = Reasoning and Acting — padrao de loop Thought / Action / Observation  ·  ReWOO = Reasoning WithOut Observation — raciocinio sem observacao intermediaria  ·  ToT = Tree of Thoughts — Arvore de Pensamentos</a:t>
+            </a:r>
+          </a:p>
+        </p:txBody>
+      </p:sp>
+      <p:sp>
+        <p:nvSpPr>
+          <p:cNvPr id="8" name="TextBox 7"/>
+          <p:cNvSpPr txBox="1"/>
+          <p:nvPr/>
+        </p:nvSpPr>
+        <p:spPr>
+          <a:xfrm>
             <a:off x="274320" y="6400800"/>
             <a:ext cx="6400800" cy="365760"/>
           </a:xfrm>
@@ -11221,7 +11293,7 @@
       </p:sp>
       <p:sp>
         <p:nvSpPr>
-          <p:cNvPr id="8" name="TextBox 7"/>
+          <p:cNvPr id="9" name="TextBox 8"/>
           <p:cNvSpPr txBox="1"/>
           <p:nvPr/>
         </p:nvSpPr>
@@ -11646,6 +11718,42 @@
         </p:nvSpPr>
         <p:spPr>
           <a:xfrm>
+            <a:off x="274320" y="6035040"/>
+            <a:ext cx="11612880" cy="320040"/>
+          </a:xfrm>
+          <a:prstGeom prst="rect">
+            <a:avLst/>
+          </a:prstGeom>
+          <a:noFill/>
+        </p:spPr>
+        <p:txBody>
+          <a:bodyPr wrap="square">
+            <a:spAutoFit/>
+          </a:bodyPr>
+          <a:lstStyle/>
+          <a:p>
+            <a:pPr algn="l">
+              <a:defRPr sz="900" b="0">
+                <a:solidFill>
+                  <a:srgbClr val="2980B9"/>
+                </a:solidFill>
+                <a:latin typeface="Segoe UI"/>
+              </a:defRPr>
+            </a:pPr>
+            <a:r>
+              <a:t>BFS = Breadth-First Search — Busca em Largura  ·  DFS = Depth-First Search — Busca em Profundidade</a:t>
+            </a:r>
+          </a:p>
+        </p:txBody>
+      </p:sp>
+      <p:sp>
+        <p:nvSpPr>
+          <p:cNvPr id="8" name="TextBox 7"/>
+          <p:cNvSpPr txBox="1"/>
+          <p:nvPr/>
+        </p:nvSpPr>
+        <p:spPr>
+          <a:xfrm>
             <a:off x="274320" y="6400800"/>
             <a:ext cx="6400800" cy="365760"/>
           </a:xfrm>
@@ -11676,7 +11784,7 @@
       </p:sp>
       <p:sp>
         <p:nvSpPr>
-          <p:cNvPr id="8" name="TextBox 7"/>
+          <p:cNvPr id="9" name="TextBox 8"/>
           <p:cNvSpPr txBox="1"/>
           <p:nvPr/>
         </p:nvSpPr>
@@ -15228,6 +15336,42 @@
         </p:nvSpPr>
         <p:spPr>
           <a:xfrm>
+            <a:off x="274320" y="6035040"/>
+            <a:ext cx="11612880" cy="320040"/>
+          </a:xfrm>
+          <a:prstGeom prst="rect">
+            <a:avLst/>
+          </a:prstGeom>
+          <a:noFill/>
+        </p:spPr>
+        <p:txBody>
+          <a:bodyPr wrap="square">
+            <a:spAutoFit/>
+          </a:bodyPr>
+          <a:lstStyle/>
+          <a:p>
+            <a:pPr algn="l">
+              <a:defRPr sz="900" b="0">
+                <a:solidFill>
+                  <a:srgbClr val="2980B9"/>
+                </a:solidFill>
+                <a:latin typeface="Segoe UI"/>
+              </a:defRPr>
+            </a:pPr>
+            <a:r>
+              <a:t>AgentOps = Agent Operations — operacao e monitoramento de agentes em producao</a:t>
+            </a:r>
+          </a:p>
+        </p:txBody>
+      </p:sp>
+      <p:sp>
+        <p:nvSpPr>
+          <p:cNvPr id="8" name="TextBox 7"/>
+          <p:cNvSpPr txBox="1"/>
+          <p:nvPr/>
+        </p:nvSpPr>
+        <p:spPr>
+          <a:xfrm>
             <a:off x="274320" y="6400800"/>
             <a:ext cx="6400800" cy="365760"/>
           </a:xfrm>
@@ -15258,7 +15402,7 @@
       </p:sp>
       <p:sp>
         <p:nvSpPr>
-          <p:cNvPr id="8" name="TextBox 7"/>
+          <p:cNvPr id="9" name="TextBox 8"/>
           <p:cNvSpPr txBox="1"/>
           <p:nvPr/>
         </p:nvSpPr>
@@ -19439,6 +19583,42 @@
         </p:nvSpPr>
         <p:spPr>
           <a:xfrm>
+            <a:off x="274320" y="6035040"/>
+            <a:ext cx="11612880" cy="320040"/>
+          </a:xfrm>
+          <a:prstGeom prst="rect">
+            <a:avLst/>
+          </a:prstGeom>
+          <a:noFill/>
+        </p:spPr>
+        <p:txBody>
+          <a:bodyPr wrap="square">
+            <a:spAutoFit/>
+          </a:bodyPr>
+          <a:lstStyle/>
+          <a:p>
+            <a:pPr algn="l">
+              <a:defRPr sz="900" b="0">
+                <a:solidFill>
+                  <a:srgbClr val="2980B9"/>
+                </a:solidFill>
+                <a:latin typeface="Segoe UI"/>
+              </a:defRPr>
+            </a:pPr>
+            <a:r>
+              <a:t>CoT = Chain-of-Thought — Cadeia de Pensamento  ·  MCTS = Monte Carlo Tree Search — Busca em Arvore de Monte Carlo</a:t>
+            </a:r>
+          </a:p>
+        </p:txBody>
+      </p:sp>
+      <p:sp>
+        <p:nvSpPr>
+          <p:cNvPr id="8" name="TextBox 7"/>
+          <p:cNvSpPr txBox="1"/>
+          <p:nvPr/>
+        </p:nvSpPr>
+        <p:spPr>
+          <a:xfrm>
             <a:off x="274320" y="6400800"/>
             <a:ext cx="6400800" cy="365760"/>
           </a:xfrm>
@@ -19469,7 +19649,7 @@
       </p:sp>
       <p:sp>
         <p:nvSpPr>
-          <p:cNvPr id="8" name="TextBox 7"/>
+          <p:cNvPr id="9" name="TextBox 8"/>
           <p:cNvSpPr txBox="1"/>
           <p:nvPr/>
         </p:nvSpPr>
@@ -21244,6 +21424,42 @@
         </p:nvSpPr>
         <p:spPr>
           <a:xfrm>
+            <a:off x="274320" y="6035040"/>
+            <a:ext cx="11612880" cy="320040"/>
+          </a:xfrm>
+          <a:prstGeom prst="rect">
+            <a:avLst/>
+          </a:prstGeom>
+          <a:noFill/>
+        </p:spPr>
+        <p:txBody>
+          <a:bodyPr wrap="square">
+            <a:spAutoFit/>
+          </a:bodyPr>
+          <a:lstStyle/>
+          <a:p>
+            <a:pPr algn="l">
+              <a:defRPr sz="900" b="0">
+                <a:solidFill>
+                  <a:srgbClr val="2980B9"/>
+                </a:solidFill>
+                <a:latin typeface="Segoe UI"/>
+              </a:defRPr>
+            </a:pPr>
+            <a:r>
+              <a:t>RAG = Retrieval-Augmented Generation — Geracao Aumentada por Recuperacao</a:t>
+            </a:r>
+          </a:p>
+        </p:txBody>
+      </p:sp>
+      <p:sp>
+        <p:nvSpPr>
+          <p:cNvPr id="8" name="TextBox 7"/>
+          <p:cNvSpPr txBox="1"/>
+          <p:nvPr/>
+        </p:nvSpPr>
+        <p:spPr>
+          <a:xfrm>
             <a:off x="274320" y="6400800"/>
             <a:ext cx="6400800" cy="365760"/>
           </a:xfrm>
@@ -21274,7 +21490,7 @@
       </p:sp>
       <p:sp>
         <p:nvSpPr>
-          <p:cNvPr id="8" name="TextBox 7"/>
+          <p:cNvPr id="9" name="TextBox 8"/>
           <p:cNvSpPr txBox="1"/>
           <p:nvPr/>
         </p:nvSpPr>
@@ -22707,6 +22923,42 @@
         </p:nvSpPr>
         <p:spPr>
           <a:xfrm>
+            <a:off x="274320" y="6035040"/>
+            <a:ext cx="11612880" cy="320040"/>
+          </a:xfrm>
+          <a:prstGeom prst="rect">
+            <a:avLst/>
+          </a:prstGeom>
+          <a:noFill/>
+        </p:spPr>
+        <p:txBody>
+          <a:bodyPr wrap="square">
+            <a:spAutoFit/>
+          </a:bodyPr>
+          <a:lstStyle/>
+          <a:p>
+            <a:pPr algn="l">
+              <a:defRPr sz="900" b="0">
+                <a:solidFill>
+                  <a:srgbClr val="2980B9"/>
+                </a:solidFill>
+                <a:latin typeface="Segoe UI"/>
+              </a:defRPr>
+            </a:pPr>
+            <a:r>
+              <a:t>LLM = Large Language Model — Modelo de Linguagem de Grande Escala</a:t>
+            </a:r>
+          </a:p>
+        </p:txBody>
+      </p:sp>
+      <p:sp>
+        <p:nvSpPr>
+          <p:cNvPr id="8" name="TextBox 7"/>
+          <p:cNvSpPr txBox="1"/>
+          <p:nvPr/>
+        </p:nvSpPr>
+        <p:spPr>
+          <a:xfrm>
             <a:off x="274320" y="6400800"/>
             <a:ext cx="6400800" cy="365760"/>
           </a:xfrm>
@@ -22737,7 +22989,7 @@
       </p:sp>
       <p:sp>
         <p:nvSpPr>
-          <p:cNvPr id="8" name="TextBox 7"/>
+          <p:cNvPr id="9" name="TextBox 8"/>
           <p:cNvSpPr txBox="1"/>
           <p:nvPr/>
         </p:nvSpPr>
